--- a/poster/AIB-template-powerpoint.pptx
+++ b/poster/AIB-template-powerpoint.pptx
@@ -243,7 +243,7 @@
           <a:p>
             <a:fld id="{23CA6365-2E98-4DD1-BDAA-4579F8393497}" type="datetimeFigureOut">
               <a:rPr lang="en-US" smtClean="0"/>
-              <a:t>4/16/24</a:t>
+              <a:t>6/15/25</a:t>
             </a:fld>
             <a:endParaRPr lang="en-US"/>
           </a:p>
@@ -413,7 +413,7 @@
           <a:p>
             <a:fld id="{23CA6365-2E98-4DD1-BDAA-4579F8393497}" type="datetimeFigureOut">
               <a:rPr lang="en-US" smtClean="0"/>
-              <a:t>4/16/24</a:t>
+              <a:t>6/15/25</a:t>
             </a:fld>
             <a:endParaRPr lang="en-US"/>
           </a:p>
@@ -593,7 +593,7 @@
           <a:p>
             <a:fld id="{23CA6365-2E98-4DD1-BDAA-4579F8393497}" type="datetimeFigureOut">
               <a:rPr lang="en-US" smtClean="0"/>
-              <a:t>4/16/24</a:t>
+              <a:t>6/15/25</a:t>
             </a:fld>
             <a:endParaRPr lang="en-US"/>
           </a:p>
@@ -763,7 +763,7 @@
           <a:p>
             <a:fld id="{23CA6365-2E98-4DD1-BDAA-4579F8393497}" type="datetimeFigureOut">
               <a:rPr lang="en-US" smtClean="0"/>
-              <a:t>4/16/24</a:t>
+              <a:t>6/15/25</a:t>
             </a:fld>
             <a:endParaRPr lang="en-US"/>
           </a:p>
@@ -1007,7 +1007,7 @@
           <a:p>
             <a:fld id="{23CA6365-2E98-4DD1-BDAA-4579F8393497}" type="datetimeFigureOut">
               <a:rPr lang="en-US" smtClean="0"/>
-              <a:t>4/16/24</a:t>
+              <a:t>6/15/25</a:t>
             </a:fld>
             <a:endParaRPr lang="en-US"/>
           </a:p>
@@ -1239,7 +1239,7 @@
           <a:p>
             <a:fld id="{23CA6365-2E98-4DD1-BDAA-4579F8393497}" type="datetimeFigureOut">
               <a:rPr lang="en-US" smtClean="0"/>
-              <a:t>4/16/24</a:t>
+              <a:t>6/15/25</a:t>
             </a:fld>
             <a:endParaRPr lang="en-US"/>
           </a:p>
@@ -1606,7 +1606,7 @@
           <a:p>
             <a:fld id="{23CA6365-2E98-4DD1-BDAA-4579F8393497}" type="datetimeFigureOut">
               <a:rPr lang="en-US" smtClean="0"/>
-              <a:t>4/16/24</a:t>
+              <a:t>6/15/25</a:t>
             </a:fld>
             <a:endParaRPr lang="en-US"/>
           </a:p>
@@ -1724,7 +1724,7 @@
           <a:p>
             <a:fld id="{23CA6365-2E98-4DD1-BDAA-4579F8393497}" type="datetimeFigureOut">
               <a:rPr lang="en-US" smtClean="0"/>
-              <a:t>4/16/24</a:t>
+              <a:t>6/15/25</a:t>
             </a:fld>
             <a:endParaRPr lang="en-US"/>
           </a:p>
@@ -1819,7 +1819,7 @@
           <a:p>
             <a:fld id="{23CA6365-2E98-4DD1-BDAA-4579F8393497}" type="datetimeFigureOut">
               <a:rPr lang="en-US" smtClean="0"/>
-              <a:t>4/16/24</a:t>
+              <a:t>6/15/25</a:t>
             </a:fld>
             <a:endParaRPr lang="en-US"/>
           </a:p>
@@ -2096,7 +2096,7 @@
           <a:p>
             <a:fld id="{23CA6365-2E98-4DD1-BDAA-4579F8393497}" type="datetimeFigureOut">
               <a:rPr lang="en-US" smtClean="0"/>
-              <a:t>4/16/24</a:t>
+              <a:t>6/15/25</a:t>
             </a:fld>
             <a:endParaRPr lang="en-US"/>
           </a:p>
@@ -2353,7 +2353,7 @@
           <a:p>
             <a:fld id="{23CA6365-2E98-4DD1-BDAA-4579F8393497}" type="datetimeFigureOut">
               <a:rPr lang="en-US" smtClean="0"/>
-              <a:t>4/16/24</a:t>
+              <a:t>6/15/25</a:t>
             </a:fld>
             <a:endParaRPr lang="en-US"/>
           </a:p>
@@ -2566,7 +2566,7 @@
           <a:p>
             <a:fld id="{23CA6365-2E98-4DD1-BDAA-4579F8393497}" type="datetimeFigureOut">
               <a:rPr lang="en-US" smtClean="0"/>
-              <a:t>4/16/24</a:t>
+              <a:t>6/15/25</a:t>
             </a:fld>
             <a:endParaRPr lang="en-US"/>
           </a:p>
@@ -3153,74 +3153,6 @@
       </p:cxnSp>
       <p:pic>
         <p:nvPicPr>
-          <p:cNvPr id="1030" name="Picture 6">
-            <a:extLst>
-              <a:ext uri="{FF2B5EF4-FFF2-40B4-BE49-F238E27FC236}">
-                <a16:creationId xmlns:a16="http://schemas.microsoft.com/office/drawing/2014/main" id="{35157B91-B0FC-D394-6E97-D298B24FE5DE}"/>
-              </a:ext>
-            </a:extLst>
-          </p:cNvPr>
-          <p:cNvPicPr>
-            <a:picLocks noChangeAspect="1" noChangeArrowheads="1"/>
-          </p:cNvPicPr>
-          <p:nvPr/>
-        </p:nvPicPr>
-        <p:blipFill rotWithShape="1">
-          <a:blip r:embed="rId3">
-            <a:extLst>
-              <a:ext uri="{28A0092B-C50C-407E-A947-70E740481C1C}">
-                <a14:useLocalDpi xmlns:a14="http://schemas.microsoft.com/office/drawing/2010/main" val="0"/>
-              </a:ext>
-            </a:extLst>
-          </a:blip>
-          <a:srcRect l="52325" r="40028"/>
-          <a:stretch/>
-        </p:blipFill>
-        <p:spPr bwMode="auto">
-          <a:xfrm>
-            <a:off x="25567549" y="1132979"/>
-            <a:ext cx="1696568" cy="1042733"/>
-          </a:xfrm>
-          <a:prstGeom prst="rect">
-            <a:avLst/>
-          </a:prstGeom>
-          <a:noFill/>
-          <a:ln>
-            <a:noFill/>
-          </a:ln>
-          <a:effectLst/>
-          <a:extLst>
-            <a:ext uri="{909E8E84-426E-40DD-AFC4-6F175D3DCCD1}">
-              <a14:hiddenFill xmlns:a14="http://schemas.microsoft.com/office/drawing/2010/main">
-                <a:solidFill>
-                  <a:srgbClr val="5B9BD5"/>
-                </a:solidFill>
-              </a14:hiddenFill>
-            </a:ext>
-            <a:ext uri="{91240B29-F687-4F45-9708-019B960494DF}">
-              <a14:hiddenLine xmlns:a14="http://schemas.microsoft.com/office/drawing/2010/main" w="25400" algn="ctr">
-                <a:solidFill>
-                  <a:srgbClr val="000000"/>
-                </a:solidFill>
-                <a:miter lim="800000"/>
-                <a:headEnd/>
-                <a:tailEnd/>
-              </a14:hiddenLine>
-            </a:ext>
-            <a:ext uri="{AF507438-7753-43E0-B8FC-AC1667EBCBE1}">
-              <a14:hiddenEffects xmlns:a14="http://schemas.microsoft.com/office/drawing/2010/main">
-                <a:effectLst>
-                  <a:outerShdw dist="35921" dir="2700000" algn="ctr" rotWithShape="0">
-                    <a:srgbClr val="000000"/>
-                  </a:outerShdw>
-                </a:effectLst>
-              </a14:hiddenEffects>
-            </a:ext>
-          </a:extLst>
-        </p:spPr>
-      </p:pic>
-      <p:pic>
-        <p:nvPicPr>
           <p:cNvPr id="1031" name="Picture 7">
             <a:extLst>
               <a:ext uri="{FF2B5EF4-FFF2-40B4-BE49-F238E27FC236}">
@@ -3234,7 +3166,7 @@
           <p:nvPr/>
         </p:nvPicPr>
         <p:blipFill>
-          <a:blip r:embed="rId4">
+          <a:blip r:embed="rId3">
             <a:extLst>
               <a:ext uri="{28A0092B-C50C-407E-A947-70E740481C1C}">
                 <a14:useLocalDpi xmlns:a14="http://schemas.microsoft.com/office/drawing/2010/main" val="0"/>
@@ -4682,7 +4614,7 @@
           <p:nvPr/>
         </p:nvPicPr>
         <p:blipFill>
-          <a:blip r:embed="rId5">
+          <a:blip r:embed="rId4">
             <a:extLst>
               <a:ext uri="{28A0092B-C50C-407E-A947-70E740481C1C}">
                 <a14:useLocalDpi xmlns:a14="http://schemas.microsoft.com/office/drawing/2010/main" val="0"/>
@@ -4696,7 +4628,7 @@
         </p:blipFill>
         <p:spPr bwMode="auto">
           <a:xfrm>
-            <a:off x="23523800" y="1118032"/>
+            <a:off x="21086966" y="1118032"/>
             <a:ext cx="2018348" cy="974346"/>
           </a:xfrm>
           <a:prstGeom prst="rect">
@@ -4729,7 +4661,7 @@
           <p:nvPr/>
         </p:nvPicPr>
         <p:blipFill>
-          <a:blip r:embed="rId6">
+          <a:blip r:embed="rId5">
             <a:extLst>
               <a:ext uri="{28A0092B-C50C-407E-A947-70E740481C1C}">
                 <a14:useLocalDpi xmlns:a14="http://schemas.microsoft.com/office/drawing/2010/main" val="0"/>
@@ -4742,8 +4674,91 @@
         </p:blipFill>
         <p:spPr>
           <a:xfrm>
-            <a:off x="27183777" y="969339"/>
+            <a:off x="23218866" y="969339"/>
             <a:ext cx="2018348" cy="1220100"/>
+          </a:xfrm>
+          <a:prstGeom prst="rect">
+            <a:avLst/>
+          </a:prstGeom>
+        </p:spPr>
+      </p:pic>
+      <p:pic>
+        <p:nvPicPr>
+          <p:cNvPr id="2" name="Picture 2" descr="Mahidol University - Wikipedia">
+            <a:extLst>
+              <a:ext uri="{FF2B5EF4-FFF2-40B4-BE49-F238E27FC236}">
+                <a16:creationId xmlns:a16="http://schemas.microsoft.com/office/drawing/2014/main" id="{5022EF5B-FF1A-B435-421F-E142FED6BE82}"/>
+              </a:ext>
+            </a:extLst>
+          </p:cNvPr>
+          <p:cNvPicPr>
+            <a:picLocks noChangeAspect="1" noChangeArrowheads="1"/>
+          </p:cNvPicPr>
+          <p:nvPr/>
+        </p:nvPicPr>
+        <p:blipFill>
+          <a:blip r:embed="rId6">
+            <a:extLst>
+              <a:ext uri="{28A0092B-C50C-407E-A947-70E740481C1C}">
+                <a14:useLocalDpi xmlns:a14="http://schemas.microsoft.com/office/drawing/2010/main" val="0"/>
+              </a:ext>
+            </a:extLst>
+          </a:blip>
+          <a:srcRect/>
+          <a:stretch>
+            <a:fillRect/>
+          </a:stretch>
+        </p:blipFill>
+        <p:spPr bwMode="auto">
+          <a:xfrm>
+            <a:off x="27923860" y="969339"/>
+            <a:ext cx="1394090" cy="1394090"/>
+          </a:xfrm>
+          <a:prstGeom prst="rect">
+            <a:avLst/>
+          </a:prstGeom>
+          <a:noFill/>
+          <a:extLst>
+            <a:ext uri="{909E8E84-426E-40DD-AFC4-6F175D3DCCD1}">
+              <a14:hiddenFill xmlns:a14="http://schemas.microsoft.com/office/drawing/2010/main">
+                <a:solidFill>
+                  <a:srgbClr val="FFFFFF"/>
+                </a:solidFill>
+              </a14:hiddenFill>
+            </a:ext>
+          </a:extLst>
+        </p:spPr>
+      </p:pic>
+      <p:pic>
+        <p:nvPicPr>
+          <p:cNvPr id="12" name="Picture 11" descr="A blue and red text on a black background&#10;&#10;AI-generated content may be incorrect.">
+            <a:extLst>
+              <a:ext uri="{FF2B5EF4-FFF2-40B4-BE49-F238E27FC236}">
+                <a16:creationId xmlns:a16="http://schemas.microsoft.com/office/drawing/2014/main" id="{CAF21F15-335C-4A07-CD69-847399708D90}"/>
+              </a:ext>
+            </a:extLst>
+          </p:cNvPr>
+          <p:cNvPicPr>
+            <a:picLocks noChangeAspect="1"/>
+          </p:cNvPicPr>
+          <p:nvPr/>
+        </p:nvPicPr>
+        <p:blipFill>
+          <a:blip r:embed="rId7">
+            <a:extLst>
+              <a:ext uri="{28A0092B-C50C-407E-A947-70E740481C1C}">
+                <a14:useLocalDpi xmlns:a14="http://schemas.microsoft.com/office/drawing/2010/main" val="0"/>
+              </a:ext>
+            </a:extLst>
+          </a:blip>
+          <a:stretch>
+            <a:fillRect/>
+          </a:stretch>
+        </p:blipFill>
+        <p:spPr>
+          <a:xfrm>
+            <a:off x="25079583" y="731520"/>
+            <a:ext cx="2730727" cy="1631909"/>
           </a:xfrm>
           <a:prstGeom prst="rect">
             <a:avLst/>
